--- a/entregaveis/Apresentacao_DecidAI.pptx
+++ b/entregaveis/Apresentacao_DecidAI.pptx
@@ -3070,7 +3070,7 @@
                 <a:ea typeface="Calibri" pitchFamily="34" charset="-122"/>
                 <a:cs typeface="Calibri" pitchFamily="34" charset="-120"/>
               </a:rPr>
-              <a:t>Daniel Dewes  ·  Cesario Stoquero  ·  Samuel Maciel</a:t>
+              <a:t>Daniel Dewes  ·  Cesario Stoquero  ·  Samuel Maciel ·  Guilherme Capeletti</a:t>
             </a:r>
             <a:endParaRPr lang="en-US" sz="1400" dirty="0"/>
           </a:p>
